--- a/docs/video-series/04_Algo_MAX_Роль_Родитель.pptx
+++ b/docs/video-series/04_Algo_MAX_Роль_Родитель.pptx
@@ -3628,8 +3628,8 @@
         </p:blipFill>
         <p:spPr>
           <a:xfrm>
-            <a:off x="7938762" y="877824"/>
-            <a:ext cx="855994" cy="5394959"/>
+            <a:off x="7946625" y="877824"/>
+            <a:ext cx="840269" cy="5394959"/>
           </a:xfrm>
           <a:prstGeom prst="rect">
             <a:avLst/>
@@ -4437,7 +4437,7 @@
               </a:spcAft>
             </a:pPr>
             <a:r>
-              <a:rPr sz="780" b="1">
+              <a:rPr sz="850" b="1">
                 <a:solidFill>
                   <a:srgbClr val="21172F"/>
                 </a:solidFill>
@@ -5955,7 +5955,7 @@
               </a:spcAft>
             </a:pPr>
             <a:r>
-              <a:rPr sz="780" b="1">
+              <a:rPr sz="850" b="1">
                 <a:solidFill>
                   <a:srgbClr val="21172F"/>
                 </a:solidFill>
@@ -7473,7 +7473,7 @@
               </a:spcAft>
             </a:pPr>
             <a:r>
-              <a:rPr sz="780" b="1">
+              <a:rPr sz="850" b="1">
                 <a:solidFill>
                   <a:srgbClr val="21172F"/>
                 </a:solidFill>
@@ -8766,8 +8766,8 @@
         </p:blipFill>
         <p:spPr>
           <a:xfrm>
-            <a:off x="1571034" y="2432303"/>
-            <a:ext cx="1740826" cy="3767327"/>
+            <a:off x="1981730" y="2432303"/>
+            <a:ext cx="919435" cy="3767327"/>
           </a:xfrm>
           <a:prstGeom prst="rect">
             <a:avLst/>
@@ -10196,8 +10196,8 @@
         </p:blipFill>
         <p:spPr>
           <a:xfrm>
-            <a:off x="1571034" y="2432303"/>
-            <a:ext cx="1740826" cy="3767327"/>
+            <a:off x="1981730" y="2432303"/>
+            <a:ext cx="919435" cy="3767327"/>
           </a:xfrm>
           <a:prstGeom prst="rect">
             <a:avLst/>
@@ -10212,7 +10212,7 @@
         </p:nvSpPr>
         <p:spPr>
           <a:xfrm>
-            <a:off x="2195439" y="3559942"/>
+            <a:off x="2203653" y="3559942"/>
             <a:ext cx="457200" cy="457200"/>
           </a:xfrm>
           <a:prstGeom prst="ellipse">
@@ -10255,7 +10255,7 @@
         </p:nvSpPr>
         <p:spPr>
           <a:xfrm>
-            <a:off x="2259447" y="3623950"/>
+            <a:off x="2267661" y="3623950"/>
             <a:ext cx="329184" cy="329184"/>
           </a:xfrm>
           <a:prstGeom prst="ellipse">
@@ -10307,7 +10307,7 @@
         </p:nvSpPr>
         <p:spPr>
           <a:xfrm rot="18900000">
-            <a:off x="2515479" y="3898270"/>
+            <a:off x="2523693" y="3898270"/>
             <a:ext cx="256032" cy="365760"/>
           </a:xfrm>
           <a:prstGeom prst="upArrow">
@@ -11626,8 +11626,8 @@
         </p:blipFill>
         <p:spPr>
           <a:xfrm>
-            <a:off x="1571034" y="2432303"/>
-            <a:ext cx="1740826" cy="3767327"/>
+            <a:off x="1981730" y="2432303"/>
+            <a:ext cx="919435" cy="3767327"/>
           </a:xfrm>
           <a:prstGeom prst="rect">
             <a:avLst/>
@@ -13056,8 +13056,8 @@
         </p:blipFill>
         <p:spPr>
           <a:xfrm>
-            <a:off x="1571034" y="2432303"/>
-            <a:ext cx="1740826" cy="3767327"/>
+            <a:off x="1639451" y="2432303"/>
+            <a:ext cx="1603993" cy="3767327"/>
           </a:xfrm>
           <a:prstGeom prst="rect">
             <a:avLst/>
@@ -14486,8 +14486,8 @@
         </p:blipFill>
         <p:spPr>
           <a:xfrm>
-            <a:off x="1571034" y="2432303"/>
-            <a:ext cx="1740826" cy="3767327"/>
+            <a:off x="1639451" y="2432303"/>
+            <a:ext cx="1603993" cy="3767327"/>
           </a:xfrm>
           <a:prstGeom prst="rect">
             <a:avLst/>
@@ -15916,8 +15916,8 @@
         </p:blipFill>
         <p:spPr>
           <a:xfrm>
-            <a:off x="1571034" y="2432303"/>
-            <a:ext cx="1740826" cy="3767327"/>
+            <a:off x="1639451" y="2432303"/>
+            <a:ext cx="1603993" cy="3767327"/>
           </a:xfrm>
           <a:prstGeom prst="rect">
             <a:avLst/>
@@ -18776,8 +18776,8 @@
         </p:blipFill>
         <p:spPr>
           <a:xfrm>
-            <a:off x="1866620" y="2432303"/>
-            <a:ext cx="1149654" cy="3767327"/>
+            <a:off x="1877216" y="2432303"/>
+            <a:ext cx="1128462" cy="3767327"/>
           </a:xfrm>
           <a:prstGeom prst="rect">
             <a:avLst/>
@@ -23066,8 +23066,8 @@
         </p:blipFill>
         <p:spPr>
           <a:xfrm>
-            <a:off x="1789603" y="2432303"/>
-            <a:ext cx="1303689" cy="3767327"/>
+            <a:off x="1804302" y="2432303"/>
+            <a:ext cx="1274291" cy="3767327"/>
           </a:xfrm>
           <a:prstGeom prst="rect">
             <a:avLst/>
@@ -24496,8 +24496,8 @@
         </p:blipFill>
         <p:spPr>
           <a:xfrm>
-            <a:off x="1789603" y="2432303"/>
-            <a:ext cx="1303689" cy="3767327"/>
+            <a:off x="1804302" y="2432303"/>
+            <a:ext cx="1274291" cy="3767327"/>
           </a:xfrm>
           <a:prstGeom prst="rect">
             <a:avLst/>
@@ -25926,8 +25926,8 @@
         </p:blipFill>
         <p:spPr>
           <a:xfrm>
-            <a:off x="1789603" y="2432303"/>
-            <a:ext cx="1303689" cy="3767327"/>
+            <a:off x="1804302" y="2432303"/>
+            <a:ext cx="1274291" cy="3767327"/>
           </a:xfrm>
           <a:prstGeom prst="rect">
             <a:avLst/>
@@ -32625,8 +32625,8 @@
         </p:blipFill>
         <p:spPr>
           <a:xfrm>
-            <a:off x="1866620" y="2432303"/>
-            <a:ext cx="1149654" cy="3767327"/>
+            <a:off x="1877216" y="2432303"/>
+            <a:ext cx="1128462" cy="3767327"/>
           </a:xfrm>
           <a:prstGeom prst="rect">
             <a:avLst/>
@@ -34055,8 +34055,8 @@
         </p:blipFill>
         <p:spPr>
           <a:xfrm>
-            <a:off x="1866620" y="2432303"/>
-            <a:ext cx="1149654" cy="3767327"/>
+            <a:off x="1877216" y="2432303"/>
+            <a:ext cx="1128462" cy="3767327"/>
           </a:xfrm>
           <a:prstGeom prst="rect">
             <a:avLst/>
@@ -35440,8 +35440,8 @@
         </p:blipFill>
         <p:spPr>
           <a:xfrm>
-            <a:off x="1866620" y="2432303"/>
-            <a:ext cx="1149654" cy="3767327"/>
+            <a:off x="1877216" y="2432303"/>
+            <a:ext cx="1128462" cy="3767327"/>
           </a:xfrm>
           <a:prstGeom prst="rect">
             <a:avLst/>
@@ -36382,8 +36382,8 @@
         </p:blipFill>
         <p:spPr>
           <a:xfrm>
-            <a:off x="1654907" y="2432303"/>
-            <a:ext cx="1573081" cy="3767327"/>
+            <a:off x="1668967" y="2432303"/>
+            <a:ext cx="1544961" cy="3767327"/>
           </a:xfrm>
           <a:prstGeom prst="rect">
             <a:avLst/>
@@ -36607,7 +36607,7 @@
               </a:spcAft>
             </a:pPr>
             <a:r>
-              <a:rPr sz="780" b="1">
+              <a:rPr sz="850" b="1">
                 <a:solidFill>
                   <a:srgbClr val="21172F"/>
                 </a:solidFill>
@@ -37900,8 +37900,8 @@
         </p:blipFill>
         <p:spPr>
           <a:xfrm>
-            <a:off x="1654907" y="2432303"/>
-            <a:ext cx="1573081" cy="3767327"/>
+            <a:off x="1668967" y="2432303"/>
+            <a:ext cx="1544961" cy="3767327"/>
           </a:xfrm>
           <a:prstGeom prst="rect">
             <a:avLst/>
@@ -38125,7 +38125,7 @@
               </a:spcAft>
             </a:pPr>
             <a:r>
-              <a:rPr sz="780" b="1">
+              <a:rPr sz="850" b="1">
                 <a:solidFill>
                   <a:srgbClr val="21172F"/>
                 </a:solidFill>
@@ -39418,8 +39418,8 @@
         </p:blipFill>
         <p:spPr>
           <a:xfrm>
-            <a:off x="1654907" y="2432303"/>
-            <a:ext cx="1573081" cy="3767327"/>
+            <a:off x="1668967" y="2432303"/>
+            <a:ext cx="1544961" cy="3767327"/>
           </a:xfrm>
           <a:prstGeom prst="rect">
             <a:avLst/>
@@ -39643,7 +39643,7 @@
               </a:spcAft>
             </a:pPr>
             <a:r>
-              <a:rPr sz="780" b="1">
+              <a:rPr sz="850" b="1">
                 <a:solidFill>
                   <a:srgbClr val="21172F"/>
                 </a:solidFill>
@@ -40891,8 +40891,8 @@
         </p:blipFill>
         <p:spPr>
           <a:xfrm>
-            <a:off x="1654907" y="2432303"/>
-            <a:ext cx="1573081" cy="3767327"/>
+            <a:off x="1668967" y="2432303"/>
+            <a:ext cx="1544961" cy="3767327"/>
           </a:xfrm>
           <a:prstGeom prst="rect">
             <a:avLst/>
